--- a/media/resources/BirOrunduuOnduktar/Onduktar_Koshuu_Kemituu_JooptorTorchosu.pptx
+++ b/media/resources/BirOrunduuOnduktar/Onduktar_Koshuu_Kemituu_JooptorTorchosu.pptx
@@ -7584,7 +7584,7 @@
                           <a:ea typeface="+mn-ea"/>
                           <a:cs typeface="+mn-cs"/>
                         </a:rPr>
-                        <a:t>2.2</a:t>
+                        <a:t>2,2</a:t>
                       </a:r>
                     </a:p>
                   </a:txBody>
@@ -7667,7 +7667,7 @@
                           <a:ea typeface="+mn-ea"/>
                           <a:cs typeface="+mn-cs"/>
                         </a:rPr>
-                        <a:t>0.5</a:t>
+                        <a:t>0,5</a:t>
                       </a:r>
                     </a:p>
                   </a:txBody>
@@ -7833,7 +7833,7 @@
                           <a:ea typeface="+mn-ea"/>
                           <a:cs typeface="+mn-cs"/>
                         </a:rPr>
-                        <a:t>1.5</a:t>
+                        <a:t>1,5</a:t>
                       </a:r>
                     </a:p>
                   </a:txBody>
@@ -7916,7 +7916,7 @@
                           <a:ea typeface="+mn-ea"/>
                           <a:cs typeface="+mn-cs"/>
                         </a:rPr>
-                        <a:t>9.9</a:t>
+                        <a:t>9,9</a:t>
                       </a:r>
                     </a:p>
                   </a:txBody>
@@ -8006,7 +8006,7 @@
                           <a:ea typeface="+mn-ea"/>
                           <a:cs typeface="+mn-cs"/>
                         </a:rPr>
-                        <a:t>3.5</a:t>
+                        <a:t>3,5</a:t>
                       </a:r>
                     </a:p>
                   </a:txBody>
@@ -8089,7 +8089,7 @@
                           <a:ea typeface="+mn-ea"/>
                           <a:cs typeface="+mn-cs"/>
                         </a:rPr>
-                        <a:t>1.4</a:t>
+                        <a:t>1,4</a:t>
                       </a:r>
                     </a:p>
                   </a:txBody>
@@ -8172,7 +8172,7 @@
                           <a:ea typeface="+mn-ea"/>
                           <a:cs typeface="+mn-cs"/>
                         </a:rPr>
-                        <a:t>17.2</a:t>
+                        <a:t>17,2</a:t>
                       </a:r>
                     </a:p>
                   </a:txBody>
@@ -8255,7 +8255,7 @@
                           <a:ea typeface="+mn-ea"/>
                           <a:cs typeface="+mn-cs"/>
                         </a:rPr>
-                        <a:t>0.4</a:t>
+                        <a:t>0,4</a:t>
                       </a:r>
                     </a:p>
                   </a:txBody>
@@ -8338,7 +8338,7 @@
                           <a:ea typeface="+mn-ea"/>
                           <a:cs typeface="+mn-cs"/>
                         </a:rPr>
-                        <a:t>1.6</a:t>
+                        <a:t>1,6</a:t>
                       </a:r>
                     </a:p>
                   </a:txBody>
@@ -8428,7 +8428,7 @@
                           <a:ea typeface="+mn-ea"/>
                           <a:cs typeface="+mn-cs"/>
                         </a:rPr>
-                        <a:t>4.3</a:t>
+                        <a:t>4,3</a:t>
                       </a:r>
                     </a:p>
                   </a:txBody>
@@ -8511,7 +8511,7 @@
                           <a:ea typeface="+mn-ea"/>
                           <a:cs typeface="+mn-cs"/>
                         </a:rPr>
-                        <a:t>0.1</a:t>
+                        <a:t>0,1</a:t>
                       </a:r>
                     </a:p>
                   </a:txBody>
@@ -8594,7 +8594,7 @@
                           <a:ea typeface="+mn-ea"/>
                           <a:cs typeface="+mn-cs"/>
                         </a:rPr>
-                        <a:t>3.6</a:t>
+                        <a:t>3,6</a:t>
                       </a:r>
                     </a:p>
                   </a:txBody>
@@ -8677,7 +8677,7 @@
                           <a:ea typeface="+mn-ea"/>
                           <a:cs typeface="+mn-cs"/>
                         </a:rPr>
-                        <a:t>2.5</a:t>
+                        <a:t>2,5</a:t>
                       </a:r>
                     </a:p>
                   </a:txBody>
@@ -8760,7 +8760,7 @@
                           <a:ea typeface="+mn-ea"/>
                           <a:cs typeface="+mn-cs"/>
                         </a:rPr>
-                        <a:t>4.4</a:t>
+                        <a:t>4,4</a:t>
                       </a:r>
                     </a:p>
                   </a:txBody>
@@ -8933,7 +8933,7 @@
                           <a:ea typeface="+mn-ea"/>
                           <a:cs typeface="+mn-cs"/>
                         </a:rPr>
-                        <a:t>7.8</a:t>
+                        <a:t>7,8</a:t>
                       </a:r>
                     </a:p>
                   </a:txBody>
@@ -9016,7 +9016,7 @@
                           <a:ea typeface="+mn-ea"/>
                           <a:cs typeface="+mn-cs"/>
                         </a:rPr>
-                        <a:t>4.8</a:t>
+                        <a:t>4,8</a:t>
                       </a:r>
                     </a:p>
                   </a:txBody>
@@ -9099,7 +9099,7 @@
                           <a:ea typeface="+mn-ea"/>
                           <a:cs typeface="+mn-cs"/>
                         </a:rPr>
-                        <a:t>1.4</a:t>
+                        <a:t>1,4</a:t>
                       </a:r>
                     </a:p>
                   </a:txBody>
@@ -9182,7 +9182,7 @@
                           <a:ea typeface="+mn-ea"/>
                           <a:cs typeface="+mn-cs"/>
                         </a:rPr>
-                        <a:t>3.7</a:t>
+                        <a:t>3,7</a:t>
                       </a:r>
                     </a:p>
                   </a:txBody>
@@ -9272,7 +9272,7 @@
                           <a:ea typeface="+mn-ea"/>
                           <a:cs typeface="+mn-cs"/>
                         </a:rPr>
-                        <a:t>2.8</a:t>
+                        <a:t>2,8</a:t>
                       </a:r>
                     </a:p>
                   </a:txBody>
@@ -9355,7 +9355,7 @@
                           <a:ea typeface="+mn-ea"/>
                           <a:cs typeface="+mn-cs"/>
                         </a:rPr>
-                        <a:t>4.7</a:t>
+                        <a:t>4,7</a:t>
                       </a:r>
                     </a:p>
                   </a:txBody>
@@ -9438,7 +9438,7 @@
                           <a:ea typeface="+mn-ea"/>
                           <a:cs typeface="+mn-cs"/>
                         </a:rPr>
-                        <a:t>3.2</a:t>
+                        <a:t>3,2</a:t>
                       </a:r>
                     </a:p>
                   </a:txBody>
@@ -9521,7 +9521,7 @@
                           <a:ea typeface="+mn-ea"/>
                           <a:cs typeface="+mn-cs"/>
                         </a:rPr>
-                        <a:t>5.8</a:t>
+                        <a:t>5,8</a:t>
                       </a:r>
                     </a:p>
                   </a:txBody>
@@ -9604,7 +9604,7 @@
                           <a:ea typeface="+mn-ea"/>
                           <a:cs typeface="+mn-cs"/>
                         </a:rPr>
-                        <a:t>8.9</a:t>
+                        <a:t>8,9</a:t>
                       </a:r>
                     </a:p>
                   </a:txBody>
@@ -9735,7 +9735,7 @@
                           </a:solidFill>
                           <a:latin typeface="Bahnschrift" panose="020B0502040204020203" pitchFamily="34" charset="0"/>
                         </a:rPr>
-                        <a:t>1.1 + 2.5</a:t>
+                        <a:t>1,1 + 2,5</a:t>
                       </a:r>
                       <a:endParaRPr lang="en-GB" sz="2400" b="0" dirty="0">
                         <a:solidFill>
@@ -9808,7 +9808,7 @@
                           </a:solidFill>
                           <a:latin typeface="Bahnschrift" panose="020B0502040204020203" pitchFamily="34" charset="0"/>
                         </a:rPr>
-                        <a:t>3.9 </a:t>
+                        <a:t>3,9 </a:t>
                       </a:r>
                       <a:r>
                         <a:rPr lang="en-GB" sz="2400" b="0" dirty="0">
@@ -9827,7 +9827,7 @@
                           </a:solidFill>
                           <a:latin typeface="Bahnschrift" panose="020B0502040204020203" pitchFamily="34" charset="0"/>
                         </a:rPr>
-                        <a:t> 2.4</a:t>
+                        <a:t> 2,4</a:t>
                       </a:r>
                     </a:p>
                   </a:txBody>
@@ -9894,7 +9894,7 @@
                           </a:solidFill>
                           <a:latin typeface="Bahnschrift" panose="020B0502040204020203" pitchFamily="34" charset="0"/>
                         </a:rPr>
-                        <a:t>7.3 + 1.6</a:t>
+                        <a:t>7,3 + 1,6</a:t>
                       </a:r>
                     </a:p>
                   </a:txBody>
@@ -9961,7 +9961,7 @@
                           </a:solidFill>
                           <a:latin typeface="Bahnschrift" panose="020B0502040204020203" pitchFamily="34" charset="0"/>
                         </a:rPr>
-                        <a:t>5.6 </a:t>
+                        <a:t>5,6 </a:t>
                       </a:r>
                       <a:r>
                         <a:rPr lang="en-GB" sz="2400" b="0" dirty="0">
@@ -9980,7 +9980,7 @@
                           </a:solidFill>
                           <a:latin typeface="Bahnschrift" panose="020B0502040204020203" pitchFamily="34" charset="0"/>
                         </a:rPr>
-                        <a:t> 2.8</a:t>
+                        <a:t> 2,8</a:t>
                       </a:r>
                     </a:p>
                   </a:txBody>
@@ -10047,7 +10047,7 @@
                           </a:solidFill>
                           <a:latin typeface="Bahnschrift" panose="020B0502040204020203" pitchFamily="34" charset="0"/>
                         </a:rPr>
-                        <a:t>3.0 + 0.7</a:t>
+                        <a:t>3,0 + 0,7</a:t>
                       </a:r>
                     </a:p>
                   </a:txBody>
@@ -10121,7 +10121,7 @@
                           </a:solidFill>
                           <a:latin typeface="Bahnschrift" panose="020B0502040204020203" pitchFamily="34" charset="0"/>
                         </a:rPr>
-                        <a:t>7.2 </a:t>
+                        <a:t>7,2 </a:t>
                       </a:r>
                       <a:r>
                         <a:rPr lang="en-GB" sz="2400" b="0" dirty="0">
@@ -10140,7 +10140,7 @@
                           </a:solidFill>
                           <a:latin typeface="Bahnschrift" panose="020B0502040204020203" pitchFamily="34" charset="0"/>
                         </a:rPr>
-                        <a:t> 3.7</a:t>
+                        <a:t> 3,7</a:t>
                       </a:r>
                     </a:p>
                   </a:txBody>
@@ -10207,7 +10207,7 @@
                           </a:solidFill>
                           <a:latin typeface="Bahnschrift" panose="020B0502040204020203" pitchFamily="34" charset="0"/>
                         </a:rPr>
-                        <a:t>4.2 + 3.6</a:t>
+                        <a:t>4,2 + 3,6</a:t>
                       </a:r>
                     </a:p>
                   </a:txBody>
@@ -10274,7 +10274,7 @@
                           </a:solidFill>
                           <a:latin typeface="Bahnschrift" panose="020B0502040204020203" pitchFamily="34" charset="0"/>
                         </a:rPr>
-                        <a:t>0.7 </a:t>
+                        <a:t>0,7 </a:t>
                       </a:r>
                       <a:r>
                         <a:rPr lang="en-GB" sz="2400" b="0" dirty="0">
@@ -10293,7 +10293,7 @@
                           </a:solidFill>
                           <a:latin typeface="Bahnschrift" panose="020B0502040204020203" pitchFamily="34" charset="0"/>
                         </a:rPr>
-                        <a:t> 0.2</a:t>
+                        <a:t> 0,2</a:t>
                       </a:r>
                     </a:p>
                   </a:txBody>
@@ -10360,7 +10360,7 @@
                           </a:solidFill>
                           <a:latin typeface="Bahnschrift" panose="020B0502040204020203" pitchFamily="34" charset="0"/>
                         </a:rPr>
-                        <a:t>4.0 + 1.8</a:t>
+                        <a:t>4,0 + 1,8</a:t>
                       </a:r>
                     </a:p>
                   </a:txBody>
@@ -10427,7 +10427,7 @@
                           </a:solidFill>
                           <a:latin typeface="Bahnschrift" panose="020B0502040204020203" pitchFamily="34" charset="0"/>
                         </a:rPr>
-                        <a:t>2.2 </a:t>
+                        <a:t>2,2 </a:t>
                       </a:r>
                       <a:r>
                         <a:rPr lang="en-GB" sz="2400" b="0" dirty="0">
@@ -10446,7 +10446,7 @@
                           </a:solidFill>
                           <a:latin typeface="Bahnschrift" panose="020B0502040204020203" pitchFamily="34" charset="0"/>
                         </a:rPr>
-                        <a:t> 0.6</a:t>
+                        <a:t> 0,6</a:t>
                       </a:r>
                     </a:p>
                   </a:txBody>
@@ -10520,7 +10520,7 @@
                           </a:solidFill>
                           <a:latin typeface="Bahnschrift" panose="020B0502040204020203" pitchFamily="34" charset="0"/>
                         </a:rPr>
-                        <a:t>0.7 + 0.7</a:t>
+                        <a:t>0,7 + 0,7</a:t>
                       </a:r>
                     </a:p>
                   </a:txBody>
@@ -10587,7 +10587,7 @@
                           </a:solidFill>
                           <a:latin typeface="Bahnschrift" panose="020B0502040204020203" pitchFamily="34" charset="0"/>
                         </a:rPr>
-                        <a:t>2.3 </a:t>
+                        <a:t>2,3 </a:t>
                       </a:r>
                       <a:r>
                         <a:rPr lang="en-GB" sz="2400" b="0" dirty="0">
@@ -10606,7 +10606,7 @@
                           </a:solidFill>
                           <a:latin typeface="Bahnschrift" panose="020B0502040204020203" pitchFamily="34" charset="0"/>
                         </a:rPr>
-                        <a:t> 1.9</a:t>
+                        <a:t> 1,9</a:t>
                       </a:r>
                     </a:p>
                   </a:txBody>
@@ -10673,7 +10673,7 @@
                           </a:solidFill>
                           <a:latin typeface="Bahnschrift" panose="020B0502040204020203" pitchFamily="34" charset="0"/>
                         </a:rPr>
-                        <a:t>0.9 + 2.9</a:t>
+                        <a:t>0,9 + 2,9</a:t>
                       </a:r>
                     </a:p>
                   </a:txBody>
@@ -10740,7 +10740,7 @@
                           </a:solidFill>
                           <a:latin typeface="Bahnschrift" panose="020B0502040204020203" pitchFamily="34" charset="0"/>
                         </a:rPr>
-                        <a:t>4.5 </a:t>
+                        <a:t>4,5 </a:t>
                       </a:r>
                       <a:r>
                         <a:rPr lang="en-GB" sz="2400" b="0" dirty="0">
@@ -10759,7 +10759,7 @@
                           </a:solidFill>
                           <a:latin typeface="Bahnschrift" panose="020B0502040204020203" pitchFamily="34" charset="0"/>
                         </a:rPr>
-                        <a:t> 2.0</a:t>
+                        <a:t> 2,0</a:t>
                       </a:r>
                     </a:p>
                   </a:txBody>
@@ -10826,7 +10826,7 @@
                           </a:solidFill>
                           <a:latin typeface="Bahnschrift" panose="020B0502040204020203" pitchFamily="34" charset="0"/>
                         </a:rPr>
-                        <a:t>11.4 + 5.8</a:t>
+                        <a:t>11,4 + 5,8</a:t>
                       </a:r>
                     </a:p>
                   </a:txBody>
@@ -10919,7 +10919,7 @@
                           </a:solidFill>
                           <a:latin typeface="Bahnschrift" panose="020B0502040204020203" pitchFamily="34" charset="0"/>
                         </a:rPr>
-                        <a:t> 1.7</a:t>
+                        <a:t> 1,7</a:t>
                       </a:r>
                     </a:p>
                   </a:txBody>
@@ -10986,7 +10986,7 @@
                           </a:solidFill>
                           <a:latin typeface="Bahnschrift" panose="020B0502040204020203" pitchFamily="34" charset="0"/>
                         </a:rPr>
-                        <a:t>3.3 + 6.6</a:t>
+                        <a:t>3,3 + 6,6</a:t>
                       </a:r>
                     </a:p>
                   </a:txBody>
@@ -11053,7 +11053,7 @@
                           </a:solidFill>
                           <a:latin typeface="Bahnschrift" panose="020B0502040204020203" pitchFamily="34" charset="0"/>
                         </a:rPr>
-                        <a:t>3.8 </a:t>
+                        <a:t>3,8 </a:t>
                       </a:r>
                       <a:r>
                         <a:rPr lang="en-GB" sz="2400" b="0" dirty="0">
@@ -11072,7 +11072,7 @@
                           </a:solidFill>
                           <a:latin typeface="Bahnschrift" panose="020B0502040204020203" pitchFamily="34" charset="0"/>
                         </a:rPr>
-                        <a:t> 2.2</a:t>
+                        <a:t> 2,2</a:t>
                       </a:r>
                     </a:p>
                   </a:txBody>
@@ -11139,7 +11139,7 @@
                           </a:solidFill>
                           <a:latin typeface="Bahnschrift" panose="020B0502040204020203" pitchFamily="34" charset="0"/>
                         </a:rPr>
-                        <a:t>4.1 + 0.6</a:t>
+                        <a:t>4,1 + 0,6</a:t>
                       </a:r>
                     </a:p>
                   </a:txBody>
@@ -11225,7 +11225,7 @@
                           </a:solidFill>
                           <a:latin typeface="Bahnschrift" panose="020B0502040204020203" pitchFamily="34" charset="0"/>
                         </a:rPr>
-                        <a:t> 2.8</a:t>
+                        <a:t> 2,8</a:t>
                       </a:r>
                       <a:endParaRPr lang="en-GB" sz="2400" b="0" dirty="0">
                         <a:solidFill>
@@ -11693,7 +11693,7 @@
                           <a:ea typeface="+mn-ea"/>
                           <a:cs typeface="+mn-cs"/>
                         </a:rPr>
-                        <a:t>2.2</a:t>
+                        <a:t>2,2</a:t>
                       </a:r>
                     </a:p>
                   </a:txBody>
@@ -11779,7 +11779,7 @@
                           <a:ea typeface="+mn-ea"/>
                           <a:cs typeface="+mn-cs"/>
                         </a:rPr>
-                        <a:t>0.5</a:t>
+                        <a:t>0,5</a:t>
                       </a:r>
                     </a:p>
                   </a:txBody>
@@ -11945,7 +11945,7 @@
                           <a:ea typeface="+mn-ea"/>
                           <a:cs typeface="+mn-cs"/>
                         </a:rPr>
-                        <a:t>1.5</a:t>
+                        <a:t>1,5</a:t>
                       </a:r>
                     </a:p>
                   </a:txBody>
@@ -12028,7 +12028,7 @@
                           <a:ea typeface="+mn-ea"/>
                           <a:cs typeface="+mn-cs"/>
                         </a:rPr>
-                        <a:t>9.9</a:t>
+                        <a:t>9,9</a:t>
                       </a:r>
                     </a:p>
                   </a:txBody>
@@ -12118,7 +12118,7 @@
                           <a:ea typeface="+mn-ea"/>
                           <a:cs typeface="+mn-cs"/>
                         </a:rPr>
-                        <a:t>3.5</a:t>
+                        <a:t>3,5</a:t>
                       </a:r>
                     </a:p>
                   </a:txBody>
@@ -12201,7 +12201,7 @@
                           <a:ea typeface="+mn-ea"/>
                           <a:cs typeface="+mn-cs"/>
                         </a:rPr>
-                        <a:t>1.4</a:t>
+                        <a:t>1,4</a:t>
                       </a:r>
                     </a:p>
                   </a:txBody>
@@ -12284,7 +12284,7 @@
                           <a:ea typeface="+mn-ea"/>
                           <a:cs typeface="+mn-cs"/>
                         </a:rPr>
-                        <a:t>17.2</a:t>
+                        <a:t>17,2</a:t>
                       </a:r>
                     </a:p>
                   </a:txBody>
@@ -12367,7 +12367,7 @@
                           <a:ea typeface="+mn-ea"/>
                           <a:cs typeface="+mn-cs"/>
                         </a:rPr>
-                        <a:t>0.4</a:t>
+                        <a:t>0,4</a:t>
                       </a:r>
                     </a:p>
                   </a:txBody>
@@ -12450,7 +12450,7 @@
                           <a:ea typeface="+mn-ea"/>
                           <a:cs typeface="+mn-cs"/>
                         </a:rPr>
-                        <a:t>1.6</a:t>
+                        <a:t>1,6</a:t>
                       </a:r>
                     </a:p>
                   </a:txBody>
@@ -12540,7 +12540,7 @@
                           <a:ea typeface="+mn-ea"/>
                           <a:cs typeface="+mn-cs"/>
                         </a:rPr>
-                        <a:t>4.3</a:t>
+                        <a:t>4,3</a:t>
                       </a:r>
                     </a:p>
                   </a:txBody>
@@ -12623,7 +12623,7 @@
                           <a:ea typeface="+mn-ea"/>
                           <a:cs typeface="+mn-cs"/>
                         </a:rPr>
-                        <a:t>0.1</a:t>
+                        <a:t>0,1</a:t>
                       </a:r>
                     </a:p>
                   </a:txBody>
@@ -12709,7 +12709,7 @@
                           <a:ea typeface="+mn-ea"/>
                           <a:cs typeface="+mn-cs"/>
                         </a:rPr>
-                        <a:t>3.6</a:t>
+                        <a:t>3,6</a:t>
                       </a:r>
                     </a:p>
                   </a:txBody>
@@ -12792,7 +12792,7 @@
                           <a:ea typeface="+mn-ea"/>
                           <a:cs typeface="+mn-cs"/>
                         </a:rPr>
-                        <a:t>2.5</a:t>
+                        <a:t>2,5</a:t>
                       </a:r>
                     </a:p>
                   </a:txBody>
@@ -12875,7 +12875,7 @@
                           <a:ea typeface="+mn-ea"/>
                           <a:cs typeface="+mn-cs"/>
                         </a:rPr>
-                        <a:t>4.4</a:t>
+                        <a:t>4,4</a:t>
                       </a:r>
                     </a:p>
                   </a:txBody>
@@ -13054,7 +13054,7 @@
                           <a:ea typeface="+mn-ea"/>
                           <a:cs typeface="+mn-cs"/>
                         </a:rPr>
-                        <a:t>7.8</a:t>
+                        <a:t>7,8</a:t>
                       </a:r>
                     </a:p>
                   </a:txBody>
@@ -13137,7 +13137,7 @@
                           <a:ea typeface="+mn-ea"/>
                           <a:cs typeface="+mn-cs"/>
                         </a:rPr>
-                        <a:t>4.8</a:t>
+                        <a:t>4,8</a:t>
                       </a:r>
                     </a:p>
                   </a:txBody>
@@ -13220,7 +13220,7 @@
                           <a:ea typeface="+mn-ea"/>
                           <a:cs typeface="+mn-cs"/>
                         </a:rPr>
-                        <a:t>1.4</a:t>
+                        <a:t>1,4</a:t>
                       </a:r>
                     </a:p>
                   </a:txBody>
@@ -13306,7 +13306,7 @@
                           <a:ea typeface="+mn-ea"/>
                           <a:cs typeface="+mn-cs"/>
                         </a:rPr>
-                        <a:t>3.7</a:t>
+                        <a:t>3,7</a:t>
                       </a:r>
                     </a:p>
                   </a:txBody>
@@ -13396,7 +13396,7 @@
                           <a:ea typeface="+mn-ea"/>
                           <a:cs typeface="+mn-cs"/>
                         </a:rPr>
-                        <a:t>2.8</a:t>
+                        <a:t>2,8</a:t>
                       </a:r>
                     </a:p>
                   </a:txBody>
@@ -13479,7 +13479,7 @@
                           <a:ea typeface="+mn-ea"/>
                           <a:cs typeface="+mn-cs"/>
                         </a:rPr>
-                        <a:t>4.7</a:t>
+                        <a:t>4,7</a:t>
                       </a:r>
                     </a:p>
                   </a:txBody>
@@ -13562,7 +13562,7 @@
                           <a:ea typeface="+mn-ea"/>
                           <a:cs typeface="+mn-cs"/>
                         </a:rPr>
-                        <a:t>3.2</a:t>
+                        <a:t>3,2</a:t>
                       </a:r>
                     </a:p>
                   </a:txBody>
@@ -13645,7 +13645,7 @@
                           <a:ea typeface="+mn-ea"/>
                           <a:cs typeface="+mn-cs"/>
                         </a:rPr>
-                        <a:t>5.8</a:t>
+                        <a:t>5,8</a:t>
                       </a:r>
                     </a:p>
                   </a:txBody>
@@ -13728,7 +13728,7 @@
                           <a:ea typeface="+mn-ea"/>
                           <a:cs typeface="+mn-cs"/>
                         </a:rPr>
-                        <a:t>8.9</a:t>
+                        <a:t>8,9</a:t>
                       </a:r>
                     </a:p>
                   </a:txBody>
@@ -13865,7 +13865,7 @@
                           </a:solidFill>
                           <a:latin typeface="Bahnschrift" panose="020B0502040204020203" pitchFamily="34" charset="0"/>
                         </a:rPr>
-                        <a:t>1.1 + 2.5</a:t>
+                        <a:t>1,1 + 2,5</a:t>
                       </a:r>
                       <a:endParaRPr lang="en-GB" sz="2400" b="0" dirty="0">
                         <a:solidFill>
@@ -13938,7 +13938,7 @@
                           </a:solidFill>
                           <a:latin typeface="Bahnschrift" panose="020B0502040204020203" pitchFamily="34" charset="0"/>
                         </a:rPr>
-                        <a:t>3.9 </a:t>
+                        <a:t>3,9 </a:t>
                       </a:r>
                       <a:r>
                         <a:rPr lang="en-GB" sz="2400" b="0" dirty="0">
@@ -13957,7 +13957,7 @@
                           </a:solidFill>
                           <a:latin typeface="Bahnschrift" panose="020B0502040204020203" pitchFamily="34" charset="0"/>
                         </a:rPr>
-                        <a:t> 2.4</a:t>
+                        <a:t> 2,4</a:t>
                       </a:r>
                     </a:p>
                   </a:txBody>
@@ -14024,7 +14024,7 @@
                           </a:solidFill>
                           <a:latin typeface="Bahnschrift" panose="020B0502040204020203" pitchFamily="34" charset="0"/>
                         </a:rPr>
-                        <a:t>7.3 + 1.6</a:t>
+                        <a:t>7,3 + 1,6</a:t>
                       </a:r>
                     </a:p>
                   </a:txBody>
@@ -14091,7 +14091,7 @@
                           </a:solidFill>
                           <a:latin typeface="Bahnschrift" panose="020B0502040204020203" pitchFamily="34" charset="0"/>
                         </a:rPr>
-                        <a:t>5.6 </a:t>
+                        <a:t>5,6 </a:t>
                       </a:r>
                       <a:r>
                         <a:rPr lang="en-GB" sz="2400" b="0" dirty="0">
@@ -14110,7 +14110,7 @@
                           </a:solidFill>
                           <a:latin typeface="Bahnschrift" panose="020B0502040204020203" pitchFamily="34" charset="0"/>
                         </a:rPr>
-                        <a:t> 2.8</a:t>
+                        <a:t> 2,8</a:t>
                       </a:r>
                     </a:p>
                   </a:txBody>
@@ -14177,7 +14177,7 @@
                           </a:solidFill>
                           <a:latin typeface="Bahnschrift" panose="020B0502040204020203" pitchFamily="34" charset="0"/>
                         </a:rPr>
-                        <a:t>3.0 + 0.7</a:t>
+                        <a:t>3,0 + 0,7</a:t>
                       </a:r>
                     </a:p>
                   </a:txBody>
@@ -14251,7 +14251,7 @@
                           </a:solidFill>
                           <a:latin typeface="Bahnschrift" panose="020B0502040204020203" pitchFamily="34" charset="0"/>
                         </a:rPr>
-                        <a:t>7.2 </a:t>
+                        <a:t>7,2 </a:t>
                       </a:r>
                       <a:r>
                         <a:rPr lang="en-GB" sz="2400" b="0" dirty="0">
@@ -14270,7 +14270,7 @@
                           </a:solidFill>
                           <a:latin typeface="Bahnschrift" panose="020B0502040204020203" pitchFamily="34" charset="0"/>
                         </a:rPr>
-                        <a:t> 3.7</a:t>
+                        <a:t> 3,7</a:t>
                       </a:r>
                     </a:p>
                   </a:txBody>
@@ -14337,7 +14337,7 @@
                           </a:solidFill>
                           <a:latin typeface="Bahnschrift" panose="020B0502040204020203" pitchFamily="34" charset="0"/>
                         </a:rPr>
-                        <a:t>4.2 + 3.6</a:t>
+                        <a:t>4,2 + 3,6</a:t>
                       </a:r>
                     </a:p>
                   </a:txBody>
@@ -14404,7 +14404,7 @@
                           </a:solidFill>
                           <a:latin typeface="Bahnschrift" panose="020B0502040204020203" pitchFamily="34" charset="0"/>
                         </a:rPr>
-                        <a:t>0.7 </a:t>
+                        <a:t>0,7 </a:t>
                       </a:r>
                       <a:r>
                         <a:rPr lang="en-GB" sz="2400" b="0" dirty="0">
@@ -14423,7 +14423,7 @@
                           </a:solidFill>
                           <a:latin typeface="Bahnschrift" panose="020B0502040204020203" pitchFamily="34" charset="0"/>
                         </a:rPr>
-                        <a:t> 0.2</a:t>
+                        <a:t> 0,2</a:t>
                       </a:r>
                     </a:p>
                   </a:txBody>
@@ -14490,7 +14490,7 @@
                           </a:solidFill>
                           <a:latin typeface="Bahnschrift" panose="020B0502040204020203" pitchFamily="34" charset="0"/>
                         </a:rPr>
-                        <a:t>4.0 + 1.8</a:t>
+                        <a:t>4,0 + 1,8</a:t>
                       </a:r>
                     </a:p>
                   </a:txBody>
@@ -14557,7 +14557,7 @@
                           </a:solidFill>
                           <a:latin typeface="Bahnschrift" panose="020B0502040204020203" pitchFamily="34" charset="0"/>
                         </a:rPr>
-                        <a:t>2.2 </a:t>
+                        <a:t>2,2 </a:t>
                       </a:r>
                       <a:r>
                         <a:rPr lang="en-GB" sz="2400" b="0" dirty="0">
@@ -14576,7 +14576,7 @@
                           </a:solidFill>
                           <a:latin typeface="Bahnschrift" panose="020B0502040204020203" pitchFamily="34" charset="0"/>
                         </a:rPr>
-                        <a:t> 0.6</a:t>
+                        <a:t> 0,6</a:t>
                       </a:r>
                     </a:p>
                   </a:txBody>
@@ -14650,7 +14650,7 @@
                           </a:solidFill>
                           <a:latin typeface="Bahnschrift" panose="020B0502040204020203" pitchFamily="34" charset="0"/>
                         </a:rPr>
-                        <a:t>0.7 + 0.7</a:t>
+                        <a:t>0,7 + 0,7</a:t>
                       </a:r>
                     </a:p>
                   </a:txBody>
@@ -14717,7 +14717,7 @@
                           </a:solidFill>
                           <a:latin typeface="Bahnschrift" panose="020B0502040204020203" pitchFamily="34" charset="0"/>
                         </a:rPr>
-                        <a:t>2.3 </a:t>
+                        <a:t>2,3 </a:t>
                       </a:r>
                       <a:r>
                         <a:rPr lang="en-GB" sz="2400" b="0" dirty="0">
@@ -14736,7 +14736,7 @@
                           </a:solidFill>
                           <a:latin typeface="Bahnschrift" panose="020B0502040204020203" pitchFamily="34" charset="0"/>
                         </a:rPr>
-                        <a:t> 1.9</a:t>
+                        <a:t> 1,9</a:t>
                       </a:r>
                     </a:p>
                   </a:txBody>
@@ -14803,7 +14803,7 @@
                           </a:solidFill>
                           <a:latin typeface="Bahnschrift" panose="020B0502040204020203" pitchFamily="34" charset="0"/>
                         </a:rPr>
-                        <a:t>0.9 + 2.9</a:t>
+                        <a:t>0,9 + 2,9</a:t>
                       </a:r>
                     </a:p>
                   </a:txBody>
@@ -14870,7 +14870,7 @@
                           </a:solidFill>
                           <a:latin typeface="Bahnschrift" panose="020B0502040204020203" pitchFamily="34" charset="0"/>
                         </a:rPr>
-                        <a:t>4.5 </a:t>
+                        <a:t>4,5 </a:t>
                       </a:r>
                       <a:r>
                         <a:rPr lang="en-GB" sz="2400" b="0" dirty="0">
@@ -14889,7 +14889,7 @@
                           </a:solidFill>
                           <a:latin typeface="Bahnschrift" panose="020B0502040204020203" pitchFamily="34" charset="0"/>
                         </a:rPr>
-                        <a:t> 2.0</a:t>
+                        <a:t> 2,0</a:t>
                       </a:r>
                     </a:p>
                   </a:txBody>
@@ -14956,7 +14956,7 @@
                           </a:solidFill>
                           <a:latin typeface="Bahnschrift" panose="020B0502040204020203" pitchFamily="34" charset="0"/>
                         </a:rPr>
-                        <a:t>11.4 + 5.8</a:t>
+                        <a:t>11,4 + 5,8</a:t>
                       </a:r>
                     </a:p>
                   </a:txBody>
@@ -15049,7 +15049,7 @@
                           </a:solidFill>
                           <a:latin typeface="Bahnschrift" panose="020B0502040204020203" pitchFamily="34" charset="0"/>
                         </a:rPr>
-                        <a:t> 1.7</a:t>
+                        <a:t> 1,7</a:t>
                       </a:r>
                     </a:p>
                   </a:txBody>
@@ -15116,7 +15116,7 @@
                           </a:solidFill>
                           <a:latin typeface="Bahnschrift" panose="020B0502040204020203" pitchFamily="34" charset="0"/>
                         </a:rPr>
-                        <a:t>3.3 + 6.6</a:t>
+                        <a:t>3,3 + 6,6</a:t>
                       </a:r>
                     </a:p>
                   </a:txBody>
@@ -15183,7 +15183,7 @@
                           </a:solidFill>
                           <a:latin typeface="Bahnschrift" panose="020B0502040204020203" pitchFamily="34" charset="0"/>
                         </a:rPr>
-                        <a:t>3.8 </a:t>
+                        <a:t>3,8 </a:t>
                       </a:r>
                       <a:r>
                         <a:rPr lang="en-GB" sz="2400" b="0" dirty="0">
@@ -15202,7 +15202,7 @@
                           </a:solidFill>
                           <a:latin typeface="Bahnschrift" panose="020B0502040204020203" pitchFamily="34" charset="0"/>
                         </a:rPr>
-                        <a:t> 2.2</a:t>
+                        <a:t> 2,2</a:t>
                       </a:r>
                     </a:p>
                   </a:txBody>
@@ -15269,7 +15269,7 @@
                           </a:solidFill>
                           <a:latin typeface="Bahnschrift" panose="020B0502040204020203" pitchFamily="34" charset="0"/>
                         </a:rPr>
-                        <a:t>4.1 + 0.6</a:t>
+                        <a:t>4,1 + 0,6</a:t>
                       </a:r>
                     </a:p>
                   </a:txBody>
@@ -15355,7 +15355,7 @@
                           </a:solidFill>
                           <a:latin typeface="Bahnschrift" panose="020B0502040204020203" pitchFamily="34" charset="0"/>
                         </a:rPr>
-                        <a:t> 2.8</a:t>
+                        <a:t> 2,8</a:t>
                       </a:r>
                       <a:endParaRPr lang="en-GB" sz="2400" b="0" dirty="0">
                         <a:solidFill>
@@ -15477,7 +15477,7 @@
                             <a:sysClr val="windowText" lastClr="000000"/>
                           </a:solidFill>
                         </a:rPr>
-                        <a:t>11.1</a:t>
+                        <a:t>11,1</a:t>
                       </a:r>
                     </a:p>
                   </a:txBody>
@@ -16053,7 +16053,7 @@
             </a:pPr>
             <a:r>
               <a:rPr lang="ru-RU" sz="2400" dirty="0"/>
-              <a:t>Турдуу пикирлер учун ыраазычылык билдиребиз.</a:t>
+              <a:t>Турдуу пикирлер үчүн ыраазычылык билдиребиз.</a:t>
             </a:r>
           </a:p>
           <a:p>
